--- a/AUTOCAD INTECAP/Ejemplos DWG/CLASE 9, Lunes 16 marzo.pptx
+++ b/AUTOCAD INTECAP/Ejemplos DWG/CLASE 9, Lunes 16 marzo.pptx
@@ -148,6 +148,11 @@
       </a:defRPr>
     </a:lvl9pPr>
   </p:defaultTextStyle>
+  <p:extLst>
+    <p:ext uri="{EFAFB233-063F-42B5-8137-9DF3F51BA10A}">
+      <p15:sldGuideLst xmlns:p15="http://schemas.microsoft.com/office/powerpoint/2012/main"/>
+    </p:ext>
+  </p:extLst>
 </p:presentation>
 </file>
 
@@ -1025,7 +1030,7 @@
           <a:p>
             <a:fld id="{81E7C41E-2A07-4BD7-8961-C9AD9E59081F}" type="datetimeFigureOut">
               <a:rPr lang="es-GT" smtClean="0"/>
-              <a:t>24/03/2026</a:t>
+              <a:t>25/03/2026</a:t>
             </a:fld>
             <a:endParaRPr lang="es-GT"/>
           </a:p>
@@ -1225,7 +1230,7 @@
           <a:p>
             <a:fld id="{81E7C41E-2A07-4BD7-8961-C9AD9E59081F}" type="datetimeFigureOut">
               <a:rPr lang="es-GT" smtClean="0"/>
-              <a:t>24/03/2026</a:t>
+              <a:t>25/03/2026</a:t>
             </a:fld>
             <a:endParaRPr lang="es-GT"/>
           </a:p>
@@ -1435,7 +1440,7 @@
           <a:p>
             <a:fld id="{81E7C41E-2A07-4BD7-8961-C9AD9E59081F}" type="datetimeFigureOut">
               <a:rPr lang="es-GT" smtClean="0"/>
-              <a:t>24/03/2026</a:t>
+              <a:t>25/03/2026</a:t>
             </a:fld>
             <a:endParaRPr lang="es-GT"/>
           </a:p>
@@ -1635,7 +1640,7 @@
           <a:p>
             <a:fld id="{81E7C41E-2A07-4BD7-8961-C9AD9E59081F}" type="datetimeFigureOut">
               <a:rPr lang="es-GT" smtClean="0"/>
-              <a:t>24/03/2026</a:t>
+              <a:t>25/03/2026</a:t>
             </a:fld>
             <a:endParaRPr lang="es-GT"/>
           </a:p>
@@ -1911,7 +1916,7 @@
           <a:p>
             <a:fld id="{81E7C41E-2A07-4BD7-8961-C9AD9E59081F}" type="datetimeFigureOut">
               <a:rPr lang="es-GT" smtClean="0"/>
-              <a:t>24/03/2026</a:t>
+              <a:t>25/03/2026</a:t>
             </a:fld>
             <a:endParaRPr lang="es-GT"/>
           </a:p>
@@ -2179,7 +2184,7 @@
           <a:p>
             <a:fld id="{81E7C41E-2A07-4BD7-8961-C9AD9E59081F}" type="datetimeFigureOut">
               <a:rPr lang="es-GT" smtClean="0"/>
-              <a:t>24/03/2026</a:t>
+              <a:t>25/03/2026</a:t>
             </a:fld>
             <a:endParaRPr lang="es-GT"/>
           </a:p>
@@ -2594,7 +2599,7 @@
           <a:p>
             <a:fld id="{81E7C41E-2A07-4BD7-8961-C9AD9E59081F}" type="datetimeFigureOut">
               <a:rPr lang="es-GT" smtClean="0"/>
-              <a:t>24/03/2026</a:t>
+              <a:t>25/03/2026</a:t>
             </a:fld>
             <a:endParaRPr lang="es-GT"/>
           </a:p>
@@ -2736,7 +2741,7 @@
           <a:p>
             <a:fld id="{81E7C41E-2A07-4BD7-8961-C9AD9E59081F}" type="datetimeFigureOut">
               <a:rPr lang="es-GT" smtClean="0"/>
-              <a:t>24/03/2026</a:t>
+              <a:t>25/03/2026</a:t>
             </a:fld>
             <a:endParaRPr lang="es-GT"/>
           </a:p>
@@ -2849,7 +2854,7 @@
           <a:p>
             <a:fld id="{81E7C41E-2A07-4BD7-8961-C9AD9E59081F}" type="datetimeFigureOut">
               <a:rPr lang="es-GT" smtClean="0"/>
-              <a:t>24/03/2026</a:t>
+              <a:t>25/03/2026</a:t>
             </a:fld>
             <a:endParaRPr lang="es-GT"/>
           </a:p>
@@ -3162,7 +3167,7 @@
           <a:p>
             <a:fld id="{81E7C41E-2A07-4BD7-8961-C9AD9E59081F}" type="datetimeFigureOut">
               <a:rPr lang="es-GT" smtClean="0"/>
-              <a:t>24/03/2026</a:t>
+              <a:t>25/03/2026</a:t>
             </a:fld>
             <a:endParaRPr lang="es-GT"/>
           </a:p>
@@ -3451,7 +3456,7 @@
           <a:p>
             <a:fld id="{81E7C41E-2A07-4BD7-8961-C9AD9E59081F}" type="datetimeFigureOut">
               <a:rPr lang="es-GT" smtClean="0"/>
-              <a:t>24/03/2026</a:t>
+              <a:t>25/03/2026</a:t>
             </a:fld>
             <a:endParaRPr lang="es-GT"/>
           </a:p>
@@ -3694,7 +3699,7 @@
           <a:p>
             <a:fld id="{81E7C41E-2A07-4BD7-8961-C9AD9E59081F}" type="datetimeFigureOut">
               <a:rPr lang="es-GT" smtClean="0"/>
-              <a:t>24/03/2026</a:t>
+              <a:t>25/03/2026</a:t>
             </a:fld>
             <a:endParaRPr lang="es-GT"/>
           </a:p>
@@ -4225,8 +4230,8 @@
           </a:prstGeom>
         </p:spPr>
       </p:pic>
-      <mc:AlternateContent xmlns:mc="http://schemas.openxmlformats.org/markup-compatibility/2006">
-        <mc:Choice xmlns:p14="http://schemas.microsoft.com/office/powerpoint/2010/main" Requires="p14">
+      <mc:AlternateContent xmlns:mc="http://schemas.openxmlformats.org/markup-compatibility/2006" xmlns:p14="http://schemas.microsoft.com/office/powerpoint/2010/main">
+        <mc:Choice Requires="p14">
           <p:contentPart p14:bwMode="auto" r:id="rId3">
             <p14:nvContentPartPr>
               <p14:cNvPr id="5" name="Entrada de lápiz 4">
@@ -4245,7 +4250,7 @@
             </p14:xfrm>
           </p:contentPart>
         </mc:Choice>
-        <mc:Fallback>
+        <mc:Fallback xmlns="">
           <p:pic>
             <p:nvPicPr>
               <p:cNvPr id="5" name="Entrada de lápiz 4">
@@ -4276,8 +4281,8 @@
           </p:pic>
         </mc:Fallback>
       </mc:AlternateContent>
-      <mc:AlternateContent xmlns:mc="http://schemas.openxmlformats.org/markup-compatibility/2006">
-        <mc:Choice xmlns:p14="http://schemas.microsoft.com/office/powerpoint/2010/main" Requires="p14">
+      <mc:AlternateContent xmlns:mc="http://schemas.openxmlformats.org/markup-compatibility/2006" xmlns:p14="http://schemas.microsoft.com/office/powerpoint/2010/main">
+        <mc:Choice Requires="p14">
           <p:contentPart p14:bwMode="auto" r:id="rId5">
             <p14:nvContentPartPr>
               <p14:cNvPr id="6" name="Entrada de lápiz 5">
@@ -4296,7 +4301,7 @@
             </p14:xfrm>
           </p:contentPart>
         </mc:Choice>
-        <mc:Fallback>
+        <mc:Fallback xmlns="">
           <p:pic>
             <p:nvPicPr>
               <p:cNvPr id="6" name="Entrada de lápiz 5">
@@ -4327,8 +4332,8 @@
           </p:pic>
         </mc:Fallback>
       </mc:AlternateContent>
-      <mc:AlternateContent xmlns:mc="http://schemas.openxmlformats.org/markup-compatibility/2006">
-        <mc:Choice xmlns:p14="http://schemas.microsoft.com/office/powerpoint/2010/main" Requires="p14">
+      <mc:AlternateContent xmlns:mc="http://schemas.openxmlformats.org/markup-compatibility/2006" xmlns:p14="http://schemas.microsoft.com/office/powerpoint/2010/main">
+        <mc:Choice Requires="p14">
           <p:contentPart p14:bwMode="auto" r:id="rId7">
             <p14:nvContentPartPr>
               <p14:cNvPr id="7" name="Entrada de lápiz 6">
@@ -4347,7 +4352,7 @@
             </p14:xfrm>
           </p:contentPart>
         </mc:Choice>
-        <mc:Fallback>
+        <mc:Fallback xmlns="">
           <p:pic>
             <p:nvPicPr>
               <p:cNvPr id="7" name="Entrada de lápiz 6">
@@ -4903,8 +4908,8 @@
           </a:prstGeom>
         </p:spPr>
       </p:pic>
-      <mc:AlternateContent xmlns:mc="http://schemas.openxmlformats.org/markup-compatibility/2006">
-        <mc:Choice xmlns:p14="http://schemas.microsoft.com/office/powerpoint/2010/main" Requires="p14">
+      <mc:AlternateContent xmlns:mc="http://schemas.openxmlformats.org/markup-compatibility/2006" xmlns:p14="http://schemas.microsoft.com/office/powerpoint/2010/main">
+        <mc:Choice Requires="p14">
           <p:contentPart p14:bwMode="auto" r:id="rId3">
             <p14:nvContentPartPr>
               <p14:cNvPr id="5" name="Entrada de lápiz 4">
@@ -4923,7 +4928,7 @@
             </p14:xfrm>
           </p:contentPart>
         </mc:Choice>
-        <mc:Fallback>
+        <mc:Fallback xmlns="">
           <p:pic>
             <p:nvPicPr>
               <p:cNvPr id="5" name="Entrada de lápiz 4">
@@ -5928,8 +5933,8 @@
           </a:prstGeom>
         </p:spPr>
       </p:pic>
-      <mc:AlternateContent xmlns:mc="http://schemas.openxmlformats.org/markup-compatibility/2006">
-        <mc:Choice xmlns:p14="http://schemas.microsoft.com/office/powerpoint/2010/main" Requires="p14">
+      <mc:AlternateContent xmlns:mc="http://schemas.openxmlformats.org/markup-compatibility/2006" xmlns:p14="http://schemas.microsoft.com/office/powerpoint/2010/main">
+        <mc:Choice Requires="p14">
           <p:contentPart p14:bwMode="auto" r:id="rId3">
             <p14:nvContentPartPr>
               <p14:cNvPr id="5" name="Entrada de lápiz 4">
@@ -5948,7 +5953,7 @@
             </p14:xfrm>
           </p:contentPart>
         </mc:Choice>
-        <mc:Fallback>
+        <mc:Fallback xmlns="">
           <p:pic>
             <p:nvPicPr>
               <p:cNvPr id="5" name="Entrada de lápiz 4">
@@ -6464,8 +6469,8 @@
           </a:prstGeom>
         </p:spPr>
       </p:pic>
-      <mc:AlternateContent xmlns:mc="http://schemas.openxmlformats.org/markup-compatibility/2006">
-        <mc:Choice xmlns:p14="http://schemas.microsoft.com/office/powerpoint/2010/main" Requires="p14">
+      <mc:AlternateContent xmlns:mc="http://schemas.openxmlformats.org/markup-compatibility/2006" xmlns:p14="http://schemas.microsoft.com/office/powerpoint/2010/main">
+        <mc:Choice Requires="p14">
           <p:contentPart p14:bwMode="auto" r:id="rId3">
             <p14:nvContentPartPr>
               <p14:cNvPr id="5" name="Entrada de lápiz 4">
@@ -6484,7 +6489,7 @@
             </p14:xfrm>
           </p:contentPart>
         </mc:Choice>
-        <mc:Fallback>
+        <mc:Fallback xmlns="">
           <p:pic>
             <p:nvPicPr>
               <p:cNvPr id="5" name="Entrada de lápiz 4">
@@ -6689,8 +6694,8 @@
           </a:prstGeom>
         </p:spPr>
       </p:pic>
-      <mc:AlternateContent xmlns:mc="http://schemas.openxmlformats.org/markup-compatibility/2006">
-        <mc:Choice xmlns:p14="http://schemas.microsoft.com/office/powerpoint/2010/main" Requires="p14">
+      <mc:AlternateContent xmlns:mc="http://schemas.openxmlformats.org/markup-compatibility/2006" xmlns:p14="http://schemas.microsoft.com/office/powerpoint/2010/main">
+        <mc:Choice Requires="p14">
           <p:contentPart p14:bwMode="auto" r:id="rId3">
             <p14:nvContentPartPr>
               <p14:cNvPr id="5" name="Entrada de lápiz 4">
@@ -6709,7 +6714,7 @@
             </p14:xfrm>
           </p:contentPart>
         </mc:Choice>
-        <mc:Fallback>
+        <mc:Fallback xmlns="">
           <p:pic>
             <p:nvPicPr>
               <p:cNvPr id="5" name="Entrada de lápiz 4">
@@ -6825,8 +6830,8 @@
           </a:prstGeom>
         </p:spPr>
       </p:pic>
-      <mc:AlternateContent xmlns:mc="http://schemas.openxmlformats.org/markup-compatibility/2006">
-        <mc:Choice xmlns:p14="http://schemas.microsoft.com/office/powerpoint/2010/main" Requires="p14">
+      <mc:AlternateContent xmlns:mc="http://schemas.openxmlformats.org/markup-compatibility/2006" xmlns:p14="http://schemas.microsoft.com/office/powerpoint/2010/main">
+        <mc:Choice Requires="p14">
           <p:contentPart p14:bwMode="auto" r:id="rId3">
             <p14:nvContentPartPr>
               <p14:cNvPr id="5" name="Entrada de lápiz 4">
@@ -6845,7 +6850,7 @@
             </p14:xfrm>
           </p:contentPart>
         </mc:Choice>
-        <mc:Fallback>
+        <mc:Fallback xmlns="">
           <p:pic>
             <p:nvPicPr>
               <p:cNvPr id="5" name="Entrada de lápiz 4">
@@ -6876,8 +6881,8 @@
           </p:pic>
         </mc:Fallback>
       </mc:AlternateContent>
-      <mc:AlternateContent xmlns:mc="http://schemas.openxmlformats.org/markup-compatibility/2006">
-        <mc:Choice xmlns:p14="http://schemas.microsoft.com/office/powerpoint/2010/main" Requires="p14">
+      <mc:AlternateContent xmlns:mc="http://schemas.openxmlformats.org/markup-compatibility/2006" xmlns:p14="http://schemas.microsoft.com/office/powerpoint/2010/main">
+        <mc:Choice Requires="p14">
           <p:contentPart p14:bwMode="auto" r:id="rId5">
             <p14:nvContentPartPr>
               <p14:cNvPr id="6" name="Entrada de lápiz 5">
@@ -6896,7 +6901,7 @@
             </p14:xfrm>
           </p:contentPart>
         </mc:Choice>
-        <mc:Fallback>
+        <mc:Fallback xmlns="">
           <p:pic>
             <p:nvPicPr>
               <p:cNvPr id="6" name="Entrada de lápiz 5">
@@ -6927,8 +6932,8 @@
           </p:pic>
         </mc:Fallback>
       </mc:AlternateContent>
-      <mc:AlternateContent xmlns:mc="http://schemas.openxmlformats.org/markup-compatibility/2006">
-        <mc:Choice xmlns:p14="http://schemas.microsoft.com/office/powerpoint/2010/main" Requires="p14">
+      <mc:AlternateContent xmlns:mc="http://schemas.openxmlformats.org/markup-compatibility/2006" xmlns:p14="http://schemas.microsoft.com/office/powerpoint/2010/main">
+        <mc:Choice Requires="p14">
           <p:contentPart p14:bwMode="auto" r:id="rId7">
             <p14:nvContentPartPr>
               <p14:cNvPr id="7" name="Entrada de lápiz 6">
@@ -6947,7 +6952,7 @@
             </p14:xfrm>
           </p:contentPart>
         </mc:Choice>
-        <mc:Fallback>
+        <mc:Fallback xmlns="">
           <p:pic>
             <p:nvPicPr>
               <p:cNvPr id="7" name="Entrada de lápiz 6">
@@ -7024,12 +7029,22 @@
             <p:ph type="title"/>
           </p:nvPr>
         </p:nvSpPr>
-        <p:spPr/>
-        <p:txBody>
-          <a:bodyPr/>
-          <a:lstStyle/>
-          <a:p>
-            <a:endParaRPr lang="es-GT"/>
+        <p:spPr>
+          <a:xfrm>
+            <a:off x="3432110" y="2090673"/>
+            <a:ext cx="5963816" cy="2676654"/>
+          </a:xfrm>
+        </p:spPr>
+        <p:txBody>
+          <a:bodyPr>
+            <a:normAutofit/>
+          </a:bodyPr>
+          <a:lstStyle/>
+          <a:p>
+            <a:r>
+              <a:rPr lang="es-GT" sz="8800" b="1" dirty="0"/>
+              <a:t>MULTILINEA </a:t>
+            </a:r>
           </a:p>
         </p:txBody>
       </p:sp>
@@ -7079,12 +7094,32 @@
             <p:ph type="title"/>
           </p:nvPr>
         </p:nvSpPr>
-        <p:spPr/>
-        <p:txBody>
-          <a:bodyPr/>
-          <a:lstStyle/>
-          <a:p>
-            <a:endParaRPr lang="es-GT"/>
+        <p:spPr>
+          <a:xfrm>
+            <a:off x="1286069" y="2613803"/>
+            <a:ext cx="10515600" cy="1325563"/>
+          </a:xfrm>
+        </p:spPr>
+        <p:txBody>
+          <a:bodyPr>
+            <a:normAutofit fontScale="90000"/>
+          </a:bodyPr>
+          <a:lstStyle/>
+          <a:p>
+            <a:r>
+              <a:rPr lang="es-GT" dirty="0"/>
+              <a:t>ATT – ATRIBUTOS/BLOQUES</a:t>
+            </a:r>
+            <a:br>
+              <a:rPr lang="es-GT" dirty="0"/>
+            </a:br>
+            <a:br>
+              <a:rPr lang="es-GT" dirty="0"/>
+            </a:br>
+            <a:r>
+              <a:rPr lang="es-GT" dirty="0"/>
+              <a:t>ML – MULTILINEA </a:t>
+            </a:r>
           </a:p>
         </p:txBody>
       </p:sp>
@@ -7448,8 +7483,8 @@
           </a:prstGeom>
         </p:spPr>
       </p:pic>
-      <mc:AlternateContent xmlns:mc="http://schemas.openxmlformats.org/markup-compatibility/2006">
-        <mc:Choice xmlns:p14="http://schemas.microsoft.com/office/powerpoint/2010/main" Requires="p14">
+      <mc:AlternateContent xmlns:mc="http://schemas.openxmlformats.org/markup-compatibility/2006" xmlns:p14="http://schemas.microsoft.com/office/powerpoint/2010/main">
+        <mc:Choice Requires="p14">
           <p:contentPart p14:bwMode="auto" r:id="rId3">
             <p14:nvContentPartPr>
               <p14:cNvPr id="5" name="Entrada de lápiz 4">
@@ -7468,7 +7503,7 @@
             </p14:xfrm>
           </p:contentPart>
         </mc:Choice>
-        <mc:Fallback>
+        <mc:Fallback xmlns="">
           <p:pic>
             <p:nvPicPr>
               <p:cNvPr id="5" name="Entrada de lápiz 4">
@@ -7499,8 +7534,8 @@
           </p:pic>
         </mc:Fallback>
       </mc:AlternateContent>
-      <mc:AlternateContent xmlns:mc="http://schemas.openxmlformats.org/markup-compatibility/2006">
-        <mc:Choice xmlns:p14="http://schemas.microsoft.com/office/powerpoint/2010/main" Requires="p14">
+      <mc:AlternateContent xmlns:mc="http://schemas.openxmlformats.org/markup-compatibility/2006" xmlns:p14="http://schemas.microsoft.com/office/powerpoint/2010/main">
+        <mc:Choice Requires="p14">
           <p:contentPart p14:bwMode="auto" r:id="rId5">
             <p14:nvContentPartPr>
               <p14:cNvPr id="6" name="Entrada de lápiz 5">
@@ -7519,7 +7554,7 @@
             </p14:xfrm>
           </p:contentPart>
         </mc:Choice>
-        <mc:Fallback>
+        <mc:Fallback xmlns="">
           <p:pic>
             <p:nvPicPr>
               <p:cNvPr id="6" name="Entrada de lápiz 5">
@@ -7550,8 +7585,8 @@
           </p:pic>
         </mc:Fallback>
       </mc:AlternateContent>
-      <mc:AlternateContent xmlns:mc="http://schemas.openxmlformats.org/markup-compatibility/2006">
-        <mc:Choice xmlns:p14="http://schemas.microsoft.com/office/powerpoint/2010/main" Requires="p14">
+      <mc:AlternateContent xmlns:mc="http://schemas.openxmlformats.org/markup-compatibility/2006" xmlns:p14="http://schemas.microsoft.com/office/powerpoint/2010/main">
+        <mc:Choice Requires="p14">
           <p:contentPart p14:bwMode="auto" r:id="rId7">
             <p14:nvContentPartPr>
               <p14:cNvPr id="7" name="Entrada de lápiz 6">
@@ -7570,7 +7605,7 @@
             </p14:xfrm>
           </p:contentPart>
         </mc:Choice>
-        <mc:Fallback>
+        <mc:Fallback xmlns="">
           <p:pic>
             <p:nvPicPr>
               <p:cNvPr id="7" name="Entrada de lápiz 6">
@@ -7601,8 +7636,8 @@
           </p:pic>
         </mc:Fallback>
       </mc:AlternateContent>
-      <mc:AlternateContent xmlns:mc="http://schemas.openxmlformats.org/markup-compatibility/2006">
-        <mc:Choice xmlns:p14="http://schemas.microsoft.com/office/powerpoint/2010/main" Requires="p14">
+      <mc:AlternateContent xmlns:mc="http://schemas.openxmlformats.org/markup-compatibility/2006" xmlns:p14="http://schemas.microsoft.com/office/powerpoint/2010/main">
+        <mc:Choice Requires="p14">
           <p:contentPart p14:bwMode="auto" r:id="rId9">
             <p14:nvContentPartPr>
               <p14:cNvPr id="8" name="Entrada de lápiz 7">
@@ -7621,7 +7656,7 @@
             </p14:xfrm>
           </p:contentPart>
         </mc:Choice>
-        <mc:Fallback>
+        <mc:Fallback xmlns="">
           <p:pic>
             <p:nvPicPr>
               <p:cNvPr id="8" name="Entrada de lápiz 7">
@@ -7652,8 +7687,8 @@
           </p:pic>
         </mc:Fallback>
       </mc:AlternateContent>
-      <mc:AlternateContent xmlns:mc="http://schemas.openxmlformats.org/markup-compatibility/2006">
-        <mc:Choice xmlns:p14="http://schemas.microsoft.com/office/powerpoint/2010/main" Requires="p14">
+      <mc:AlternateContent xmlns:mc="http://schemas.openxmlformats.org/markup-compatibility/2006" xmlns:p14="http://schemas.microsoft.com/office/powerpoint/2010/main">
+        <mc:Choice Requires="p14">
           <p:contentPart p14:bwMode="auto" r:id="rId11">
             <p14:nvContentPartPr>
               <p14:cNvPr id="9" name="Entrada de lápiz 8">
@@ -7672,7 +7707,7 @@
             </p14:xfrm>
           </p:contentPart>
         </mc:Choice>
-        <mc:Fallback>
+        <mc:Fallback xmlns="">
           <p:pic>
             <p:nvPicPr>
               <p:cNvPr id="9" name="Entrada de lápiz 8">
@@ -8092,8 +8127,8 @@
           </a:p>
         </p:txBody>
       </p:sp>
-      <mc:AlternateContent xmlns:mc="http://schemas.openxmlformats.org/markup-compatibility/2006">
-        <mc:Choice xmlns:p14="http://schemas.microsoft.com/office/powerpoint/2010/main" Requires="p14">
+      <mc:AlternateContent xmlns:mc="http://schemas.openxmlformats.org/markup-compatibility/2006" xmlns:p14="http://schemas.microsoft.com/office/powerpoint/2010/main">
+        <mc:Choice Requires="p14">
           <p:contentPart p14:bwMode="auto" r:id="rId2">
             <p14:nvContentPartPr>
               <p14:cNvPr id="3" name="Entrada de lápiz 2">
@@ -8112,7 +8147,7 @@
             </p14:xfrm>
           </p:contentPart>
         </mc:Choice>
-        <mc:Fallback>
+        <mc:Fallback xmlns="">
           <p:pic>
             <p:nvPicPr>
               <p:cNvPr id="3" name="Entrada de lápiz 2">
@@ -8347,8 +8382,8 @@
           </a:prstGeom>
         </p:spPr>
       </p:pic>
-      <mc:AlternateContent xmlns:mc="http://schemas.openxmlformats.org/markup-compatibility/2006">
-        <mc:Choice xmlns:p14="http://schemas.microsoft.com/office/powerpoint/2010/main" Requires="p14">
+      <mc:AlternateContent xmlns:mc="http://schemas.openxmlformats.org/markup-compatibility/2006" xmlns:p14="http://schemas.microsoft.com/office/powerpoint/2010/main">
+        <mc:Choice Requires="p14">
           <p:contentPart p14:bwMode="auto" r:id="rId3">
             <p14:nvContentPartPr>
               <p14:cNvPr id="5" name="Entrada de lápiz 4">
@@ -8367,7 +8402,7 @@
             </p14:xfrm>
           </p:contentPart>
         </mc:Choice>
-        <mc:Fallback>
+        <mc:Fallback xmlns="">
           <p:pic>
             <p:nvPicPr>
               <p:cNvPr id="5" name="Entrada de lápiz 4">
@@ -8398,8 +8433,8 @@
           </p:pic>
         </mc:Fallback>
       </mc:AlternateContent>
-      <mc:AlternateContent xmlns:mc="http://schemas.openxmlformats.org/markup-compatibility/2006">
-        <mc:Choice xmlns:p14="http://schemas.microsoft.com/office/powerpoint/2010/main" Requires="p14">
+      <mc:AlternateContent xmlns:mc="http://schemas.openxmlformats.org/markup-compatibility/2006" xmlns:p14="http://schemas.microsoft.com/office/powerpoint/2010/main">
+        <mc:Choice Requires="p14">
           <p:contentPart p14:bwMode="auto" r:id="rId5">
             <p14:nvContentPartPr>
               <p14:cNvPr id="6" name="Entrada de lápiz 5">
@@ -8418,7 +8453,7 @@
             </p14:xfrm>
           </p:contentPart>
         </mc:Choice>
-        <mc:Fallback>
+        <mc:Fallback xmlns="">
           <p:pic>
             <p:nvPicPr>
               <p:cNvPr id="6" name="Entrada de lápiz 5">
@@ -8449,8 +8484,8 @@
           </p:pic>
         </mc:Fallback>
       </mc:AlternateContent>
-      <mc:AlternateContent xmlns:mc="http://schemas.openxmlformats.org/markup-compatibility/2006">
-        <mc:Choice xmlns:p14="http://schemas.microsoft.com/office/powerpoint/2010/main" Requires="p14">
+      <mc:AlternateContent xmlns:mc="http://schemas.openxmlformats.org/markup-compatibility/2006" xmlns:p14="http://schemas.microsoft.com/office/powerpoint/2010/main">
+        <mc:Choice Requires="p14">
           <p:contentPart p14:bwMode="auto" r:id="rId7">
             <p14:nvContentPartPr>
               <p14:cNvPr id="7" name="Entrada de lápiz 6">
@@ -8469,7 +8504,7 @@
             </p14:xfrm>
           </p:contentPart>
         </mc:Choice>
-        <mc:Fallback>
+        <mc:Fallback xmlns="">
           <p:pic>
             <p:nvPicPr>
               <p:cNvPr id="7" name="Entrada de lápiz 6">
@@ -8500,8 +8535,8 @@
           </p:pic>
         </mc:Fallback>
       </mc:AlternateContent>
-      <mc:AlternateContent xmlns:mc="http://schemas.openxmlformats.org/markup-compatibility/2006">
-        <mc:Choice xmlns:p14="http://schemas.microsoft.com/office/powerpoint/2010/main" Requires="p14">
+      <mc:AlternateContent xmlns:mc="http://schemas.openxmlformats.org/markup-compatibility/2006" xmlns:p14="http://schemas.microsoft.com/office/powerpoint/2010/main">
+        <mc:Choice Requires="p14">
           <p:contentPart p14:bwMode="auto" r:id="rId9">
             <p14:nvContentPartPr>
               <p14:cNvPr id="8" name="Entrada de lápiz 7">
@@ -8520,7 +8555,7 @@
             </p14:xfrm>
           </p:contentPart>
         </mc:Choice>
-        <mc:Fallback>
+        <mc:Fallback xmlns="">
           <p:pic>
             <p:nvPicPr>
               <p:cNvPr id="8" name="Entrada de lápiz 7">
@@ -8551,8 +8586,8 @@
           </p:pic>
         </mc:Fallback>
       </mc:AlternateContent>
-      <mc:AlternateContent xmlns:mc="http://schemas.openxmlformats.org/markup-compatibility/2006">
-        <mc:Choice xmlns:p14="http://schemas.microsoft.com/office/powerpoint/2010/main" Requires="p14">
+      <mc:AlternateContent xmlns:mc="http://schemas.openxmlformats.org/markup-compatibility/2006" xmlns:p14="http://schemas.microsoft.com/office/powerpoint/2010/main">
+        <mc:Choice Requires="p14">
           <p:contentPart p14:bwMode="auto" r:id="rId11">
             <p14:nvContentPartPr>
               <p14:cNvPr id="9" name="Entrada de lápiz 8">
@@ -8571,7 +8606,7 @@
             </p14:xfrm>
           </p:contentPart>
         </mc:Choice>
-        <mc:Fallback>
+        <mc:Fallback xmlns="">
           <p:pic>
             <p:nvPicPr>
               <p:cNvPr id="9" name="Entrada de lápiz 8">
@@ -8602,8 +8637,8 @@
           </p:pic>
         </mc:Fallback>
       </mc:AlternateContent>
-      <mc:AlternateContent xmlns:mc="http://schemas.openxmlformats.org/markup-compatibility/2006">
-        <mc:Choice xmlns:p14="http://schemas.microsoft.com/office/powerpoint/2010/main" Requires="p14">
+      <mc:AlternateContent xmlns:mc="http://schemas.openxmlformats.org/markup-compatibility/2006" xmlns:p14="http://schemas.microsoft.com/office/powerpoint/2010/main">
+        <mc:Choice Requires="p14">
           <p:contentPart p14:bwMode="auto" r:id="rId13">
             <p14:nvContentPartPr>
               <p14:cNvPr id="10" name="Entrada de lápiz 9">
@@ -8622,7 +8657,7 @@
             </p14:xfrm>
           </p:contentPart>
         </mc:Choice>
-        <mc:Fallback>
+        <mc:Fallback xmlns="">
           <p:pic>
             <p:nvPicPr>
               <p:cNvPr id="10" name="Entrada de lápiz 9">
@@ -8653,8 +8688,8 @@
           </p:pic>
         </mc:Fallback>
       </mc:AlternateContent>
-      <mc:AlternateContent xmlns:mc="http://schemas.openxmlformats.org/markup-compatibility/2006">
-        <mc:Choice xmlns:p14="http://schemas.microsoft.com/office/powerpoint/2010/main" Requires="p14">
+      <mc:AlternateContent xmlns:mc="http://schemas.openxmlformats.org/markup-compatibility/2006" xmlns:p14="http://schemas.microsoft.com/office/powerpoint/2010/main">
+        <mc:Choice Requires="p14">
           <p:contentPart p14:bwMode="auto" r:id="rId15">
             <p14:nvContentPartPr>
               <p14:cNvPr id="11" name="Entrada de lápiz 10">
@@ -8673,7 +8708,7 @@
             </p14:xfrm>
           </p:contentPart>
         </mc:Choice>
-        <mc:Fallback>
+        <mc:Fallback xmlns="">
           <p:pic>
             <p:nvPicPr>
               <p:cNvPr id="11" name="Entrada de lápiz 10">
@@ -8704,8 +8739,8 @@
           </p:pic>
         </mc:Fallback>
       </mc:AlternateContent>
-      <mc:AlternateContent xmlns:mc="http://schemas.openxmlformats.org/markup-compatibility/2006">
-        <mc:Choice xmlns:p14="http://schemas.microsoft.com/office/powerpoint/2010/main" Requires="p14">
+      <mc:AlternateContent xmlns:mc="http://schemas.openxmlformats.org/markup-compatibility/2006" xmlns:p14="http://schemas.microsoft.com/office/powerpoint/2010/main">
+        <mc:Choice Requires="p14">
           <p:contentPart p14:bwMode="auto" r:id="rId17">
             <p14:nvContentPartPr>
               <p14:cNvPr id="12" name="Entrada de lápiz 11">
@@ -8724,7 +8759,7 @@
             </p14:xfrm>
           </p:contentPart>
         </mc:Choice>
-        <mc:Fallback>
+        <mc:Fallback xmlns="">
           <p:pic>
             <p:nvPicPr>
               <p:cNvPr id="12" name="Entrada de lápiz 11">
@@ -8840,8 +8875,8 @@
           </a:prstGeom>
         </p:spPr>
       </p:pic>
-      <mc:AlternateContent xmlns:mc="http://schemas.openxmlformats.org/markup-compatibility/2006">
-        <mc:Choice xmlns:p14="http://schemas.microsoft.com/office/powerpoint/2010/main" Requires="p14">
+      <mc:AlternateContent xmlns:mc="http://schemas.openxmlformats.org/markup-compatibility/2006" xmlns:p14="http://schemas.microsoft.com/office/powerpoint/2010/main">
+        <mc:Choice Requires="p14">
           <p:contentPart p14:bwMode="auto" r:id="rId3">
             <p14:nvContentPartPr>
               <p14:cNvPr id="5" name="Entrada de lápiz 4">
@@ -8860,7 +8895,7 @@
             </p14:xfrm>
           </p:contentPart>
         </mc:Choice>
-        <mc:Fallback>
+        <mc:Fallback xmlns="">
           <p:pic>
             <p:nvPicPr>
               <p:cNvPr id="5" name="Entrada de lápiz 4">
